--- a/SM5/Operating Systems Lab/Project/RetroPie - OS Lab - Project.pptx
+++ b/SM5/Operating Systems Lab/Project/RetroPie - OS Lab - Project.pptx
@@ -7215,7 +7215,7 @@
     <p:bg>
       <p:bgPr>
         <a:solidFill>
-          <a:srgbClr val="F13737"/>
+          <a:srgbClr val="BC1142"/>
         </a:solidFill>
       </p:bgPr>
     </p:bg>
@@ -11928,7 +11928,7 @@
     <p:bg>
       <p:bgPr>
         <a:solidFill>
-          <a:srgbClr val="F13737"/>
+          <a:srgbClr val="BC1142"/>
         </a:solidFill>
       </p:bgPr>
     </p:bg>
